--- a/Workshop-Sessions/Introduction-to-Coding/Data_Wrangling.pptx
+++ b/Workshop-Sessions/Introduction-to-Coding/Data_Wrangling.pptx
@@ -280,7 +280,7 @@
   <pc:docChgLst>
     <pc:chgData name="Meg Hemmerlein" userId="675d0259-84a2-4ee2-a6c1-034493f7a163" providerId="ADAL" clId="{012228E1-9350-51F7-B0E8-CFC048A68215}"/>
     <pc:docChg chg="undo custSel addSld delSld modSld">
-      <pc:chgData name="Meg Hemmerlein" userId="675d0259-84a2-4ee2-a6c1-034493f7a163" providerId="ADAL" clId="{012228E1-9350-51F7-B0E8-CFC048A68215}" dt="2026-07-27T22:46:01.683" v="843" actId="14100"/>
+      <pc:chgData name="Meg Hemmerlein" userId="675d0259-84a2-4ee2-a6c1-034493f7a163" providerId="ADAL" clId="{012228E1-9350-51F7-B0E8-CFC048A68215}" dt="2026-08-03T20:38:54.626" v="1075" actId="20577"/>
       <pc:docMkLst>
         <pc:docMk/>
       </pc:docMkLst>
@@ -298,243 +298,6 @@
             <ac:spMk id="55" creationId="{00000000-0000-0000-0000-000000000000}"/>
           </ac:spMkLst>
         </pc:spChg>
-      </pc:sldChg>
-      <pc:sldChg chg="modSp del mod">
-        <pc:chgData name="Meg Hemmerlein" userId="675d0259-84a2-4ee2-a6c1-034493f7a163" providerId="ADAL" clId="{012228E1-9350-51F7-B0E8-CFC048A68215}" dt="2026-07-27T22:23:47.541" v="79" actId="2696"/>
-        <pc:sldMkLst>
-          <pc:docMk/>
-          <pc:sldMk cId="0" sldId="258"/>
-        </pc:sldMkLst>
-        <pc:spChg chg="mod">
-          <ac:chgData name="Meg Hemmerlein" userId="675d0259-84a2-4ee2-a6c1-034493f7a163" providerId="ADAL" clId="{012228E1-9350-51F7-B0E8-CFC048A68215}" dt="2026-07-27T22:07:13.863" v="4" actId="404"/>
-          <ac:spMkLst>
-            <pc:docMk/>
-            <pc:sldMk cId="0" sldId="258"/>
-            <ac:spMk id="71" creationId="{00000000-0000-0000-0000-000000000000}"/>
-          </ac:spMkLst>
-        </pc:spChg>
-        <pc:spChg chg="mod">
-          <ac:chgData name="Meg Hemmerlein" userId="675d0259-84a2-4ee2-a6c1-034493f7a163" providerId="ADAL" clId="{012228E1-9350-51F7-B0E8-CFC048A68215}" dt="2026-07-27T22:06:59.948" v="3" actId="14100"/>
-          <ac:spMkLst>
-            <pc:docMk/>
-            <pc:sldMk cId="0" sldId="258"/>
-            <ac:spMk id="72" creationId="{00000000-0000-0000-0000-000000000000}"/>
-          </ac:spMkLst>
-        </pc:spChg>
-      </pc:sldChg>
-      <pc:sldChg chg="modSp del mod">
-        <pc:chgData name="Meg Hemmerlein" userId="675d0259-84a2-4ee2-a6c1-034493f7a163" providerId="ADAL" clId="{012228E1-9350-51F7-B0E8-CFC048A68215}" dt="2026-07-27T22:23:47.541" v="79" actId="2696"/>
-        <pc:sldMkLst>
-          <pc:docMk/>
-          <pc:sldMk cId="0" sldId="259"/>
-        </pc:sldMkLst>
-        <pc:spChg chg="mod">
-          <ac:chgData name="Meg Hemmerlein" userId="675d0259-84a2-4ee2-a6c1-034493f7a163" providerId="ADAL" clId="{012228E1-9350-51F7-B0E8-CFC048A68215}" dt="2026-07-27T22:07:21.743" v="6" actId="255"/>
-          <ac:spMkLst>
-            <pc:docMk/>
-            <pc:sldMk cId="0" sldId="259"/>
-            <ac:spMk id="80" creationId="{00000000-0000-0000-0000-000000000000}"/>
-          </ac:spMkLst>
-        </pc:spChg>
-        <pc:spChg chg="mod">
-          <ac:chgData name="Meg Hemmerlein" userId="675d0259-84a2-4ee2-a6c1-034493f7a163" providerId="ADAL" clId="{012228E1-9350-51F7-B0E8-CFC048A68215}" dt="2026-07-27T22:07:32.854" v="10" actId="27636"/>
-          <ac:spMkLst>
-            <pc:docMk/>
-            <pc:sldMk cId="0" sldId="259"/>
-            <ac:spMk id="81" creationId="{00000000-0000-0000-0000-000000000000}"/>
-          </ac:spMkLst>
-        </pc:spChg>
-        <pc:spChg chg="mod">
-          <ac:chgData name="Meg Hemmerlein" userId="675d0259-84a2-4ee2-a6c1-034493f7a163" providerId="ADAL" clId="{012228E1-9350-51F7-B0E8-CFC048A68215}" dt="2026-07-27T22:07:28.009" v="8" actId="207"/>
-          <ac:spMkLst>
-            <pc:docMk/>
-            <pc:sldMk cId="0" sldId="259"/>
-            <ac:spMk id="83" creationId="{00000000-0000-0000-0000-000000000000}"/>
-          </ac:spMkLst>
-        </pc:spChg>
-      </pc:sldChg>
-      <pc:sldChg chg="modSp del mod">
-        <pc:chgData name="Meg Hemmerlein" userId="675d0259-84a2-4ee2-a6c1-034493f7a163" providerId="ADAL" clId="{012228E1-9350-51F7-B0E8-CFC048A68215}" dt="2026-07-27T22:23:47.541" v="79" actId="2696"/>
-        <pc:sldMkLst>
-          <pc:docMk/>
-          <pc:sldMk cId="0" sldId="260"/>
-        </pc:sldMkLst>
-        <pc:spChg chg="mod">
-          <ac:chgData name="Meg Hemmerlein" userId="675d0259-84a2-4ee2-a6c1-034493f7a163" providerId="ADAL" clId="{012228E1-9350-51F7-B0E8-CFC048A68215}" dt="2026-07-27T22:22:03.059" v="42" actId="1076"/>
-          <ac:spMkLst>
-            <pc:docMk/>
-            <pc:sldMk cId="0" sldId="260"/>
-            <ac:spMk id="88" creationId="{00000000-0000-0000-0000-000000000000}"/>
-          </ac:spMkLst>
-        </pc:spChg>
-        <pc:spChg chg="mod">
-          <ac:chgData name="Meg Hemmerlein" userId="675d0259-84a2-4ee2-a6c1-034493f7a163" providerId="ADAL" clId="{012228E1-9350-51F7-B0E8-CFC048A68215}" dt="2026-07-27T22:21:45.314" v="38" actId="207"/>
-          <ac:spMkLst>
-            <pc:docMk/>
-            <pc:sldMk cId="0" sldId="260"/>
-            <ac:spMk id="89" creationId="{00000000-0000-0000-0000-000000000000}"/>
-          </ac:spMkLst>
-        </pc:spChg>
-        <pc:picChg chg="mod">
-          <ac:chgData name="Meg Hemmerlein" userId="675d0259-84a2-4ee2-a6c1-034493f7a163" providerId="ADAL" clId="{012228E1-9350-51F7-B0E8-CFC048A68215}" dt="2026-07-27T22:21:51.254" v="40" actId="1076"/>
-          <ac:picMkLst>
-            <pc:docMk/>
-            <pc:sldMk cId="0" sldId="260"/>
-            <ac:picMk id="90" creationId="{00000000-0000-0000-0000-000000000000}"/>
-          </ac:picMkLst>
-        </pc:picChg>
-      </pc:sldChg>
-      <pc:sldChg chg="modSp del mod">
-        <pc:chgData name="Meg Hemmerlein" userId="675d0259-84a2-4ee2-a6c1-034493f7a163" providerId="ADAL" clId="{012228E1-9350-51F7-B0E8-CFC048A68215}" dt="2026-07-27T22:23:47.541" v="79" actId="2696"/>
-        <pc:sldMkLst>
-          <pc:docMk/>
-          <pc:sldMk cId="0" sldId="261"/>
-        </pc:sldMkLst>
-        <pc:spChg chg="mod">
-          <ac:chgData name="Meg Hemmerlein" userId="675d0259-84a2-4ee2-a6c1-034493f7a163" providerId="ADAL" clId="{012228E1-9350-51F7-B0E8-CFC048A68215}" dt="2026-07-27T22:22:34.562" v="49" actId="255"/>
-          <ac:spMkLst>
-            <pc:docMk/>
-            <pc:sldMk cId="0" sldId="261"/>
-            <ac:spMk id="95" creationId="{00000000-0000-0000-0000-000000000000}"/>
-          </ac:spMkLst>
-        </pc:spChg>
-        <pc:spChg chg="mod">
-          <ac:chgData name="Meg Hemmerlein" userId="675d0259-84a2-4ee2-a6c1-034493f7a163" providerId="ADAL" clId="{012228E1-9350-51F7-B0E8-CFC048A68215}" dt="2026-07-27T22:22:45.153" v="56" actId="14100"/>
-          <ac:spMkLst>
-            <pc:docMk/>
-            <pc:sldMk cId="0" sldId="261"/>
-            <ac:spMk id="96" creationId="{00000000-0000-0000-0000-000000000000}"/>
-          </ac:spMkLst>
-        </pc:spChg>
-      </pc:sldChg>
-      <pc:sldChg chg="modSp del mod">
-        <pc:chgData name="Meg Hemmerlein" userId="675d0259-84a2-4ee2-a6c1-034493f7a163" providerId="ADAL" clId="{012228E1-9350-51F7-B0E8-CFC048A68215}" dt="2026-07-27T22:23:47.541" v="79" actId="2696"/>
-        <pc:sldMkLst>
-          <pc:docMk/>
-          <pc:sldMk cId="0" sldId="262"/>
-        </pc:sldMkLst>
-        <pc:spChg chg="mod">
-          <ac:chgData name="Meg Hemmerlein" userId="675d0259-84a2-4ee2-a6c1-034493f7a163" providerId="ADAL" clId="{012228E1-9350-51F7-B0E8-CFC048A68215}" dt="2026-07-27T22:23:04.483" v="58" actId="255"/>
-          <ac:spMkLst>
-            <pc:docMk/>
-            <pc:sldMk cId="0" sldId="262"/>
-            <ac:spMk id="102" creationId="{00000000-0000-0000-0000-000000000000}"/>
-          </ac:spMkLst>
-        </pc:spChg>
-        <pc:spChg chg="mod">
-          <ac:chgData name="Meg Hemmerlein" userId="675d0259-84a2-4ee2-a6c1-034493f7a163" providerId="ADAL" clId="{012228E1-9350-51F7-B0E8-CFC048A68215}" dt="2026-07-27T22:22:57.487" v="57" actId="207"/>
-          <ac:spMkLst>
-            <pc:docMk/>
-            <pc:sldMk cId="0" sldId="262"/>
-            <ac:spMk id="103" creationId="{00000000-0000-0000-0000-000000000000}"/>
-          </ac:spMkLst>
-        </pc:spChg>
-      </pc:sldChg>
-      <pc:sldChg chg="del">
-        <pc:chgData name="Meg Hemmerlein" userId="675d0259-84a2-4ee2-a6c1-034493f7a163" providerId="ADAL" clId="{012228E1-9350-51F7-B0E8-CFC048A68215}" dt="2026-07-27T22:08:49.825" v="11" actId="2696"/>
-        <pc:sldMkLst>
-          <pc:docMk/>
-          <pc:sldMk cId="0" sldId="263"/>
-        </pc:sldMkLst>
-      </pc:sldChg>
-      <pc:sldChg chg="del">
-        <pc:chgData name="Meg Hemmerlein" userId="675d0259-84a2-4ee2-a6c1-034493f7a163" providerId="ADAL" clId="{012228E1-9350-51F7-B0E8-CFC048A68215}" dt="2026-07-27T22:08:49.825" v="11" actId="2696"/>
-        <pc:sldMkLst>
-          <pc:docMk/>
-          <pc:sldMk cId="0" sldId="264"/>
-        </pc:sldMkLst>
-      </pc:sldChg>
-      <pc:sldChg chg="del">
-        <pc:chgData name="Meg Hemmerlein" userId="675d0259-84a2-4ee2-a6c1-034493f7a163" providerId="ADAL" clId="{012228E1-9350-51F7-B0E8-CFC048A68215}" dt="2026-07-27T22:08:49.825" v="11" actId="2696"/>
-        <pc:sldMkLst>
-          <pc:docMk/>
-          <pc:sldMk cId="0" sldId="265"/>
-        </pc:sldMkLst>
-      </pc:sldChg>
-      <pc:sldChg chg="del">
-        <pc:chgData name="Meg Hemmerlein" userId="675d0259-84a2-4ee2-a6c1-034493f7a163" providerId="ADAL" clId="{012228E1-9350-51F7-B0E8-CFC048A68215}" dt="2026-07-27T22:08:49.825" v="11" actId="2696"/>
-        <pc:sldMkLst>
-          <pc:docMk/>
-          <pc:sldMk cId="0" sldId="266"/>
-        </pc:sldMkLst>
-      </pc:sldChg>
-      <pc:sldChg chg="del">
-        <pc:chgData name="Meg Hemmerlein" userId="675d0259-84a2-4ee2-a6c1-034493f7a163" providerId="ADAL" clId="{012228E1-9350-51F7-B0E8-CFC048A68215}" dt="2026-07-27T22:08:49.825" v="11" actId="2696"/>
-        <pc:sldMkLst>
-          <pc:docMk/>
-          <pc:sldMk cId="0" sldId="267"/>
-        </pc:sldMkLst>
-      </pc:sldChg>
-      <pc:sldChg chg="del">
-        <pc:chgData name="Meg Hemmerlein" userId="675d0259-84a2-4ee2-a6c1-034493f7a163" providerId="ADAL" clId="{012228E1-9350-51F7-B0E8-CFC048A68215}" dt="2026-07-27T22:22:26.479" v="47" actId="2696"/>
-        <pc:sldMkLst>
-          <pc:docMk/>
-          <pc:sldMk cId="0" sldId="268"/>
-        </pc:sldMkLst>
-      </pc:sldChg>
-      <pc:sldChg chg="del">
-        <pc:chgData name="Meg Hemmerlein" userId="675d0259-84a2-4ee2-a6c1-034493f7a163" providerId="ADAL" clId="{012228E1-9350-51F7-B0E8-CFC048A68215}" dt="2026-07-27T22:22:26.479" v="48" actId="2696"/>
-        <pc:sldMkLst>
-          <pc:docMk/>
-          <pc:sldMk cId="0" sldId="269"/>
-        </pc:sldMkLst>
-      </pc:sldChg>
-      <pc:sldChg chg="del">
-        <pc:chgData name="Meg Hemmerlein" userId="675d0259-84a2-4ee2-a6c1-034493f7a163" providerId="ADAL" clId="{012228E1-9350-51F7-B0E8-CFC048A68215}" dt="2026-07-27T22:22:26.478" v="46" actId="2696"/>
-        <pc:sldMkLst>
-          <pc:docMk/>
-          <pc:sldMk cId="0" sldId="270"/>
-        </pc:sldMkLst>
-      </pc:sldChg>
-      <pc:sldChg chg="del">
-        <pc:chgData name="Meg Hemmerlein" userId="675d0259-84a2-4ee2-a6c1-034493f7a163" providerId="ADAL" clId="{012228E1-9350-51F7-B0E8-CFC048A68215}" dt="2026-07-27T22:22:26.476" v="44" actId="2696"/>
-        <pc:sldMkLst>
-          <pc:docMk/>
-          <pc:sldMk cId="0" sldId="271"/>
-        </pc:sldMkLst>
-      </pc:sldChg>
-      <pc:sldChg chg="del">
-        <pc:chgData name="Meg Hemmerlein" userId="675d0259-84a2-4ee2-a6c1-034493f7a163" providerId="ADAL" clId="{012228E1-9350-51F7-B0E8-CFC048A68215}" dt="2026-07-27T22:22:26.477" v="45" actId="2696"/>
-        <pc:sldMkLst>
-          <pc:docMk/>
-          <pc:sldMk cId="0" sldId="272"/>
-        </pc:sldMkLst>
-      </pc:sldChg>
-      <pc:sldChg chg="del">
-        <pc:chgData name="Meg Hemmerlein" userId="675d0259-84a2-4ee2-a6c1-034493f7a163" providerId="ADAL" clId="{012228E1-9350-51F7-B0E8-CFC048A68215}" dt="2026-07-27T22:22:26.474" v="43" actId="2696"/>
-        <pc:sldMkLst>
-          <pc:docMk/>
-          <pc:sldMk cId="0" sldId="273"/>
-        </pc:sldMkLst>
-      </pc:sldChg>
-      <pc:sldChg chg="del">
-        <pc:chgData name="Meg Hemmerlein" userId="675d0259-84a2-4ee2-a6c1-034493f7a163" providerId="ADAL" clId="{012228E1-9350-51F7-B0E8-CFC048A68215}" dt="2026-07-27T22:10:04.964" v="16" actId="2696"/>
-        <pc:sldMkLst>
-          <pc:docMk/>
-          <pc:sldMk cId="0" sldId="274"/>
-        </pc:sldMkLst>
-      </pc:sldChg>
-      <pc:sldChg chg="modSp add del mod">
-        <pc:chgData name="Meg Hemmerlein" userId="675d0259-84a2-4ee2-a6c1-034493f7a163" providerId="ADAL" clId="{012228E1-9350-51F7-B0E8-CFC048A68215}" dt="2026-07-27T22:26:47.583" v="193" actId="2696"/>
-        <pc:sldMkLst>
-          <pc:docMk/>
-          <pc:sldMk cId="1574207869" sldId="274"/>
-        </pc:sldMkLst>
-        <pc:spChg chg="mod">
-          <ac:chgData name="Meg Hemmerlein" userId="675d0259-84a2-4ee2-a6c1-034493f7a163" providerId="ADAL" clId="{012228E1-9350-51F7-B0E8-CFC048A68215}" dt="2026-07-27T22:24:05.515" v="81" actId="27636"/>
-          <ac:spMkLst>
-            <pc:docMk/>
-            <pc:sldMk cId="1574207869" sldId="274"/>
-            <ac:spMk id="2" creationId="{0E33E4A0-CF0E-AD10-7DCC-B2024937C886}"/>
-          </ac:spMkLst>
-        </pc:spChg>
-      </pc:sldChg>
-      <pc:sldChg chg="del">
-        <pc:chgData name="Meg Hemmerlein" userId="675d0259-84a2-4ee2-a6c1-034493f7a163" providerId="ADAL" clId="{012228E1-9350-51F7-B0E8-CFC048A68215}" dt="2026-07-27T22:10:04.962" v="15" actId="2696"/>
-        <pc:sldMkLst>
-          <pc:docMk/>
-          <pc:sldMk cId="0" sldId="275"/>
-        </pc:sldMkLst>
       </pc:sldChg>
       <pc:sldChg chg="addSp delSp modSp new mod">
         <pc:chgData name="Meg Hemmerlein" userId="675d0259-84a2-4ee2-a6c1-034493f7a163" providerId="ADAL" clId="{012228E1-9350-51F7-B0E8-CFC048A68215}" dt="2026-07-27T22:41:39.942" v="806" actId="1076"/>
@@ -558,22 +321,6 @@
             <ac:spMk id="3" creationId="{8C18EAAF-9BD5-CC34-7F23-1881FD8280FB}"/>
           </ac:spMkLst>
         </pc:spChg>
-        <pc:spChg chg="del mod">
-          <ac:chgData name="Meg Hemmerlein" userId="675d0259-84a2-4ee2-a6c1-034493f7a163" providerId="ADAL" clId="{012228E1-9350-51F7-B0E8-CFC048A68215}" dt="2026-07-27T22:25:51.070" v="96" actId="478"/>
-          <ac:spMkLst>
-            <pc:docMk/>
-            <pc:sldMk cId="3500867540" sldId="275"/>
-            <ac:spMk id="4" creationId="{995D528A-F292-B582-DE27-EB58C89E8380}"/>
-          </ac:spMkLst>
-        </pc:spChg>
-        <pc:spChg chg="add del mod">
-          <ac:chgData name="Meg Hemmerlein" userId="675d0259-84a2-4ee2-a6c1-034493f7a163" providerId="ADAL" clId="{012228E1-9350-51F7-B0E8-CFC048A68215}" dt="2026-07-27T22:25:52.005" v="97" actId="478"/>
-          <ac:spMkLst>
-            <pc:docMk/>
-            <pc:sldMk cId="3500867540" sldId="275"/>
-            <ac:spMk id="6" creationId="{A2CD41A2-1091-6E1C-C638-AC2AFCF1DB2F}"/>
-          </ac:spMkLst>
-        </pc:spChg>
         <pc:picChg chg="add mod">
           <ac:chgData name="Meg Hemmerlein" userId="675d0259-84a2-4ee2-a6c1-034493f7a163" providerId="ADAL" clId="{012228E1-9350-51F7-B0E8-CFC048A68215}" dt="2026-07-27T22:41:39.942" v="806" actId="1076"/>
           <ac:picMkLst>
@@ -582,13 +329,6 @@
             <ac:picMk id="8" creationId="{83A87D00-D7F2-1EFC-03B9-805E4F9045AB}"/>
           </ac:picMkLst>
         </pc:picChg>
-      </pc:sldChg>
-      <pc:sldChg chg="del">
-        <pc:chgData name="Meg Hemmerlein" userId="675d0259-84a2-4ee2-a6c1-034493f7a163" providerId="ADAL" clId="{012228E1-9350-51F7-B0E8-CFC048A68215}" dt="2026-07-27T22:10:04.961" v="14" actId="2696"/>
-        <pc:sldMkLst>
-          <pc:docMk/>
-          <pc:sldMk cId="0" sldId="276"/>
-        </pc:sldMkLst>
       </pc:sldChg>
       <pc:sldChg chg="addSp modSp add mod">
         <pc:chgData name="Meg Hemmerlein" userId="675d0259-84a2-4ee2-a6c1-034493f7a163" providerId="ADAL" clId="{012228E1-9350-51F7-B0E8-CFC048A68215}" dt="2026-07-27T22:35:41.706" v="411" actId="20577"/>
@@ -637,15 +377,8 @@
           </ac:picMkLst>
         </pc:picChg>
       </pc:sldChg>
-      <pc:sldChg chg="del">
-        <pc:chgData name="Meg Hemmerlein" userId="675d0259-84a2-4ee2-a6c1-034493f7a163" providerId="ADAL" clId="{012228E1-9350-51F7-B0E8-CFC048A68215}" dt="2026-07-27T22:10:04.959" v="13" actId="2696"/>
-        <pc:sldMkLst>
-          <pc:docMk/>
-          <pc:sldMk cId="0" sldId="277"/>
-        </pc:sldMkLst>
-      </pc:sldChg>
       <pc:sldChg chg="addSp delSp modSp add mod">
-        <pc:chgData name="Meg Hemmerlein" userId="675d0259-84a2-4ee2-a6c1-034493f7a163" providerId="ADAL" clId="{012228E1-9350-51F7-B0E8-CFC048A68215}" dt="2026-07-27T22:33:22.720" v="358" actId="14100"/>
+        <pc:chgData name="Meg Hemmerlein" userId="675d0259-84a2-4ee2-a6c1-034493f7a163" providerId="ADAL" clId="{012228E1-9350-51F7-B0E8-CFC048A68215}" dt="2026-08-03T20:38:54.626" v="1075" actId="20577"/>
         <pc:sldMkLst>
           <pc:docMk/>
           <pc:sldMk cId="144269538" sldId="277"/>
@@ -659,7 +392,7 @@
           </ac:spMkLst>
         </pc:spChg>
         <pc:spChg chg="mod">
-          <ac:chgData name="Meg Hemmerlein" userId="675d0259-84a2-4ee2-a6c1-034493f7a163" providerId="ADAL" clId="{012228E1-9350-51F7-B0E8-CFC048A68215}" dt="2026-07-27T22:33:22.720" v="358" actId="14100"/>
+          <ac:chgData name="Meg Hemmerlein" userId="675d0259-84a2-4ee2-a6c1-034493f7a163" providerId="ADAL" clId="{012228E1-9350-51F7-B0E8-CFC048A68215}" dt="2026-08-03T20:38:54.626" v="1075" actId="20577"/>
           <ac:spMkLst>
             <pc:docMk/>
             <pc:sldMk cId="144269538" sldId="277"/>
@@ -674,30 +407,6 @@
             <ac:spMk id="8" creationId="{D0C066C8-29EF-790D-5870-62A3A6A92C46}"/>
           </ac:spMkLst>
         </pc:spChg>
-        <pc:picChg chg="del">
-          <ac:chgData name="Meg Hemmerlein" userId="675d0259-84a2-4ee2-a6c1-034493f7a163" providerId="ADAL" clId="{012228E1-9350-51F7-B0E8-CFC048A68215}" dt="2026-07-27T22:28:32.641" v="284" actId="478"/>
-          <ac:picMkLst>
-            <pc:docMk/>
-            <pc:sldMk cId="144269538" sldId="277"/>
-            <ac:picMk id="4" creationId="{0C0CF1CE-5547-BCB4-98D6-8E90846643A0}"/>
-          </ac:picMkLst>
-        </pc:picChg>
-        <pc:picChg chg="del">
-          <ac:chgData name="Meg Hemmerlein" userId="675d0259-84a2-4ee2-a6c1-034493f7a163" providerId="ADAL" clId="{012228E1-9350-51F7-B0E8-CFC048A68215}" dt="2026-07-27T22:28:33.139" v="285" actId="478"/>
-          <ac:picMkLst>
-            <pc:docMk/>
-            <pc:sldMk cId="144269538" sldId="277"/>
-            <ac:picMk id="5" creationId="{502923B8-90FF-ED67-7A44-2DECEA168D46}"/>
-          </ac:picMkLst>
-        </pc:picChg>
-        <pc:picChg chg="del">
-          <ac:chgData name="Meg Hemmerlein" userId="675d0259-84a2-4ee2-a6c1-034493f7a163" providerId="ADAL" clId="{012228E1-9350-51F7-B0E8-CFC048A68215}" dt="2026-07-27T22:29:11.259" v="298" actId="478"/>
-          <ac:picMkLst>
-            <pc:docMk/>
-            <pc:sldMk cId="144269538" sldId="277"/>
-            <ac:picMk id="6" creationId="{5A80FB94-1DC3-CFB5-02EE-0FA05B853E4B}"/>
-          </ac:picMkLst>
-        </pc:picChg>
         <pc:picChg chg="add mod">
           <ac:chgData name="Meg Hemmerlein" userId="675d0259-84a2-4ee2-a6c1-034493f7a163" providerId="ADAL" clId="{012228E1-9350-51F7-B0E8-CFC048A68215}" dt="2026-07-27T22:29:34.427" v="304" actId="1076"/>
           <ac:picMkLst>
@@ -706,13 +415,6 @@
             <ac:picMk id="7" creationId="{A2283905-2D74-CFE5-B9F9-F7CFA5600E4D}"/>
           </ac:picMkLst>
         </pc:picChg>
-      </pc:sldChg>
-      <pc:sldChg chg="del">
-        <pc:chgData name="Meg Hemmerlein" userId="675d0259-84a2-4ee2-a6c1-034493f7a163" providerId="ADAL" clId="{012228E1-9350-51F7-B0E8-CFC048A68215}" dt="2026-07-27T22:10:04.955" v="12" actId="2696"/>
-        <pc:sldMkLst>
-          <pc:docMk/>
-          <pc:sldMk cId="0" sldId="278"/>
-        </pc:sldMkLst>
       </pc:sldChg>
       <pc:sldChg chg="addSp delSp modSp add mod">
         <pc:chgData name="Meg Hemmerlein" userId="675d0259-84a2-4ee2-a6c1-034493f7a163" providerId="ADAL" clId="{012228E1-9350-51F7-B0E8-CFC048A68215}" dt="2026-07-27T22:35:56.113" v="415" actId="12"/>
@@ -736,14 +438,6 @@
             <ac:spMk id="3" creationId="{F44F844F-EA94-7D3F-B306-5B16A128B03B}"/>
           </ac:spMkLst>
         </pc:spChg>
-        <pc:spChg chg="del">
-          <ac:chgData name="Meg Hemmerlein" userId="675d0259-84a2-4ee2-a6c1-034493f7a163" providerId="ADAL" clId="{012228E1-9350-51F7-B0E8-CFC048A68215}" dt="2026-07-27T22:31:28.462" v="350" actId="478"/>
-          <ac:spMkLst>
-            <pc:docMk/>
-            <pc:sldMk cId="3090539091" sldId="278"/>
-            <ac:spMk id="8" creationId="{2E7B5927-54AF-DB40-2067-5661EDF8D94B}"/>
-          </ac:spMkLst>
-        </pc:spChg>
         <pc:picChg chg="add mod">
           <ac:chgData name="Meg Hemmerlein" userId="675d0259-84a2-4ee2-a6c1-034493f7a163" providerId="ADAL" clId="{012228E1-9350-51F7-B0E8-CFC048A68215}" dt="2026-07-27T22:31:43.647" v="354" actId="1076"/>
           <ac:picMkLst>
@@ -752,21 +446,6 @@
             <ac:picMk id="4" creationId="{15364C70-08CC-6B59-74EB-EF2409F7EA5B}"/>
           </ac:picMkLst>
         </pc:picChg>
-        <pc:picChg chg="del">
-          <ac:chgData name="Meg Hemmerlein" userId="675d0259-84a2-4ee2-a6c1-034493f7a163" providerId="ADAL" clId="{012228E1-9350-51F7-B0E8-CFC048A68215}" dt="2026-07-27T22:31:29.303" v="351" actId="478"/>
-          <ac:picMkLst>
-            <pc:docMk/>
-            <pc:sldMk cId="3090539091" sldId="278"/>
-            <ac:picMk id="7" creationId="{B4E8EDE6-2556-7464-BBDB-F29E28E5483C}"/>
-          </ac:picMkLst>
-        </pc:picChg>
-      </pc:sldChg>
-      <pc:sldChg chg="del">
-        <pc:chgData name="Meg Hemmerlein" userId="675d0259-84a2-4ee2-a6c1-034493f7a163" providerId="ADAL" clId="{012228E1-9350-51F7-B0E8-CFC048A68215}" dt="2026-07-27T22:10:27.775" v="18" actId="2696"/>
-        <pc:sldMkLst>
-          <pc:docMk/>
-          <pc:sldMk cId="0" sldId="279"/>
-        </pc:sldMkLst>
       </pc:sldChg>
       <pc:sldChg chg="addSp delSp modSp add mod">
         <pc:chgData name="Meg Hemmerlein" userId="675d0259-84a2-4ee2-a6c1-034493f7a163" providerId="ADAL" clId="{012228E1-9350-51F7-B0E8-CFC048A68215}" dt="2026-07-27T22:39:49.163" v="798" actId="2711"/>
@@ -790,22 +469,6 @@
             <ac:spMk id="3" creationId="{05473850-4D73-9959-57F4-7DC8D6DCF19B}"/>
           </ac:spMkLst>
         </pc:spChg>
-        <pc:spChg chg="add del mod">
-          <ac:chgData name="Meg Hemmerlein" userId="675d0259-84a2-4ee2-a6c1-034493f7a163" providerId="ADAL" clId="{012228E1-9350-51F7-B0E8-CFC048A68215}" dt="2026-07-27T22:34:31.913" v="400" actId="478"/>
-          <ac:spMkLst>
-            <pc:docMk/>
-            <pc:sldMk cId="122035855" sldId="279"/>
-            <ac:spMk id="5" creationId="{3DA76620-F235-9F02-39F9-A1EFD1AA5A3E}"/>
-          </ac:spMkLst>
-        </pc:spChg>
-        <pc:picChg chg="del">
-          <ac:chgData name="Meg Hemmerlein" userId="675d0259-84a2-4ee2-a6c1-034493f7a163" providerId="ADAL" clId="{012228E1-9350-51F7-B0E8-CFC048A68215}" dt="2026-07-27T22:35:07.124" v="403" actId="478"/>
-          <ac:picMkLst>
-            <pc:docMk/>
-            <pc:sldMk cId="122035855" sldId="279"/>
-            <ac:picMk id="4" creationId="{0A781F4B-E331-B34A-3098-190BFE6AD623}"/>
-          </ac:picMkLst>
-        </pc:picChg>
         <pc:picChg chg="add mod modCrop">
           <ac:chgData name="Meg Hemmerlein" userId="675d0259-84a2-4ee2-a6c1-034493f7a163" providerId="ADAL" clId="{012228E1-9350-51F7-B0E8-CFC048A68215}" dt="2026-07-27T22:38:03.725" v="619" actId="1076"/>
           <ac:picMkLst>
@@ -815,15 +478,8 @@
           </ac:picMkLst>
         </pc:picChg>
       </pc:sldChg>
-      <pc:sldChg chg="del">
-        <pc:chgData name="Meg Hemmerlein" userId="675d0259-84a2-4ee2-a6c1-034493f7a163" providerId="ADAL" clId="{012228E1-9350-51F7-B0E8-CFC048A68215}" dt="2026-07-27T22:10:27.798" v="32" actId="2696"/>
-        <pc:sldMkLst>
-          <pc:docMk/>
-          <pc:sldMk cId="0" sldId="280"/>
-        </pc:sldMkLst>
-      </pc:sldChg>
       <pc:sldChg chg="addSp delSp modSp new mod">
-        <pc:chgData name="Meg Hemmerlein" userId="675d0259-84a2-4ee2-a6c1-034493f7a163" providerId="ADAL" clId="{012228E1-9350-51F7-B0E8-CFC048A68215}" dt="2026-07-27T22:42:37.926" v="839" actId="20577"/>
+        <pc:chgData name="Meg Hemmerlein" userId="675d0259-84a2-4ee2-a6c1-034493f7a163" providerId="ADAL" clId="{012228E1-9350-51F7-B0E8-CFC048A68215}" dt="2026-07-28T16:19:00.525" v="888" actId="20577"/>
         <pc:sldMkLst>
           <pc:docMk/>
           <pc:sldMk cId="2082792097" sldId="280"/>
@@ -837,170 +493,13 @@
           </ac:spMkLst>
         </pc:spChg>
         <pc:spChg chg="mod">
-          <ac:chgData name="Meg Hemmerlein" userId="675d0259-84a2-4ee2-a6c1-034493f7a163" providerId="ADAL" clId="{012228E1-9350-51F7-B0E8-CFC048A68215}" dt="2026-07-27T22:42:37.926" v="839" actId="20577"/>
+          <ac:chgData name="Meg Hemmerlein" userId="675d0259-84a2-4ee2-a6c1-034493f7a163" providerId="ADAL" clId="{012228E1-9350-51F7-B0E8-CFC048A68215}" dt="2026-07-28T16:19:00.525" v="888" actId="20577"/>
           <ac:spMkLst>
             <pc:docMk/>
             <pc:sldMk cId="2082792097" sldId="280"/>
             <ac:spMk id="3" creationId="{4F354F71-4379-60F5-A984-B745ACA6C81D}"/>
           </ac:spMkLst>
         </pc:spChg>
-        <pc:spChg chg="del mod">
-          <ac:chgData name="Meg Hemmerlein" userId="675d0259-84a2-4ee2-a6c1-034493f7a163" providerId="ADAL" clId="{012228E1-9350-51F7-B0E8-CFC048A68215}" dt="2026-07-27T22:42:27.983" v="808" actId="478"/>
-          <ac:spMkLst>
-            <pc:docMk/>
-            <pc:sldMk cId="2082792097" sldId="280"/>
-            <ac:spMk id="4" creationId="{BBC4D303-EB01-D89D-E35D-4E1A03433363}"/>
-          </ac:spMkLst>
-        </pc:spChg>
-        <pc:spChg chg="add del mod">
-          <ac:chgData name="Meg Hemmerlein" userId="675d0259-84a2-4ee2-a6c1-034493f7a163" providerId="ADAL" clId="{012228E1-9350-51F7-B0E8-CFC048A68215}" dt="2026-07-27T22:42:29.408" v="809" actId="478"/>
-          <ac:spMkLst>
-            <pc:docMk/>
-            <pc:sldMk cId="2082792097" sldId="280"/>
-            <ac:spMk id="8" creationId="{35DDD1B9-D2C3-9FCD-3204-F6969DC6B9F4}"/>
-          </ac:spMkLst>
-        </pc:spChg>
-        <pc:cxnChg chg="add del mod">
-          <ac:chgData name="Meg Hemmerlein" userId="675d0259-84a2-4ee2-a6c1-034493f7a163" providerId="ADAL" clId="{012228E1-9350-51F7-B0E8-CFC048A68215}" dt="2026-07-27T22:42:26.189" v="807" actId="478"/>
-          <ac:cxnSpMkLst>
-            <pc:docMk/>
-            <pc:sldMk cId="2082792097" sldId="280"/>
-            <ac:cxnSpMk id="6" creationId="{34D4FCF5-3779-1558-A2AD-185C1B615502}"/>
-          </ac:cxnSpMkLst>
-        </pc:cxnChg>
-      </pc:sldChg>
-      <pc:sldChg chg="del">
-        <pc:chgData name="Meg Hemmerlein" userId="675d0259-84a2-4ee2-a6c1-034493f7a163" providerId="ADAL" clId="{012228E1-9350-51F7-B0E8-CFC048A68215}" dt="2026-07-27T22:10:27.804" v="36" actId="2696"/>
-        <pc:sldMkLst>
-          <pc:docMk/>
-          <pc:sldMk cId="0" sldId="281"/>
-        </pc:sldMkLst>
-      </pc:sldChg>
-      <pc:sldChg chg="del">
-        <pc:chgData name="Meg Hemmerlein" userId="675d0259-84a2-4ee2-a6c1-034493f7a163" providerId="ADAL" clId="{012228E1-9350-51F7-B0E8-CFC048A68215}" dt="2026-07-27T22:10:27.802" v="35" actId="2696"/>
-        <pc:sldMkLst>
-          <pc:docMk/>
-          <pc:sldMk cId="0" sldId="282"/>
-        </pc:sldMkLst>
-      </pc:sldChg>
-      <pc:sldChg chg="del">
-        <pc:chgData name="Meg Hemmerlein" userId="675d0259-84a2-4ee2-a6c1-034493f7a163" providerId="ADAL" clId="{012228E1-9350-51F7-B0E8-CFC048A68215}" dt="2026-07-27T22:10:27.777" v="19" actId="2696"/>
-        <pc:sldMkLst>
-          <pc:docMk/>
-          <pc:sldMk cId="0" sldId="283"/>
-        </pc:sldMkLst>
-      </pc:sldChg>
-      <pc:sldChg chg="del">
-        <pc:chgData name="Meg Hemmerlein" userId="675d0259-84a2-4ee2-a6c1-034493f7a163" providerId="ADAL" clId="{012228E1-9350-51F7-B0E8-CFC048A68215}" dt="2026-07-27T22:10:27.779" v="20" actId="2696"/>
-        <pc:sldMkLst>
-          <pc:docMk/>
-          <pc:sldMk cId="0" sldId="284"/>
-        </pc:sldMkLst>
-      </pc:sldChg>
-      <pc:sldChg chg="del">
-        <pc:chgData name="Meg Hemmerlein" userId="675d0259-84a2-4ee2-a6c1-034493f7a163" providerId="ADAL" clId="{012228E1-9350-51F7-B0E8-CFC048A68215}" dt="2026-07-27T22:10:27.801" v="34" actId="2696"/>
-        <pc:sldMkLst>
-          <pc:docMk/>
-          <pc:sldMk cId="0" sldId="285"/>
-        </pc:sldMkLst>
-      </pc:sldChg>
-      <pc:sldChg chg="del">
-        <pc:chgData name="Meg Hemmerlein" userId="675d0259-84a2-4ee2-a6c1-034493f7a163" providerId="ADAL" clId="{012228E1-9350-51F7-B0E8-CFC048A68215}" dt="2026-07-27T22:10:27.788" v="24" actId="2696"/>
-        <pc:sldMkLst>
-          <pc:docMk/>
-          <pc:sldMk cId="0" sldId="286"/>
-        </pc:sldMkLst>
-      </pc:sldChg>
-      <pc:sldChg chg="del">
-        <pc:chgData name="Meg Hemmerlein" userId="675d0259-84a2-4ee2-a6c1-034493f7a163" providerId="ADAL" clId="{012228E1-9350-51F7-B0E8-CFC048A68215}" dt="2026-07-27T22:10:27.800" v="33" actId="2696"/>
-        <pc:sldMkLst>
-          <pc:docMk/>
-          <pc:sldMk cId="0" sldId="287"/>
-        </pc:sldMkLst>
-      </pc:sldChg>
-      <pc:sldChg chg="del">
-        <pc:chgData name="Meg Hemmerlein" userId="675d0259-84a2-4ee2-a6c1-034493f7a163" providerId="ADAL" clId="{012228E1-9350-51F7-B0E8-CFC048A68215}" dt="2026-07-27T22:10:27.791" v="26" actId="2696"/>
-        <pc:sldMkLst>
-          <pc:docMk/>
-          <pc:sldMk cId="0" sldId="288"/>
-        </pc:sldMkLst>
-      </pc:sldChg>
-      <pc:sldChg chg="del">
-        <pc:chgData name="Meg Hemmerlein" userId="675d0259-84a2-4ee2-a6c1-034493f7a163" providerId="ADAL" clId="{012228E1-9350-51F7-B0E8-CFC048A68215}" dt="2026-07-27T22:10:27.786" v="23" actId="2696"/>
-        <pc:sldMkLst>
-          <pc:docMk/>
-          <pc:sldMk cId="0" sldId="289"/>
-        </pc:sldMkLst>
-      </pc:sldChg>
-      <pc:sldChg chg="del">
-        <pc:chgData name="Meg Hemmerlein" userId="675d0259-84a2-4ee2-a6c1-034493f7a163" providerId="ADAL" clId="{012228E1-9350-51F7-B0E8-CFC048A68215}" dt="2026-07-27T22:10:27.793" v="27" actId="2696"/>
-        <pc:sldMkLst>
-          <pc:docMk/>
-          <pc:sldMk cId="0" sldId="290"/>
-        </pc:sldMkLst>
-      </pc:sldChg>
-      <pc:sldChg chg="del">
-        <pc:chgData name="Meg Hemmerlein" userId="675d0259-84a2-4ee2-a6c1-034493f7a163" providerId="ADAL" clId="{012228E1-9350-51F7-B0E8-CFC048A68215}" dt="2026-07-27T22:10:27.790" v="25" actId="2696"/>
-        <pc:sldMkLst>
-          <pc:docMk/>
-          <pc:sldMk cId="0" sldId="291"/>
-        </pc:sldMkLst>
-      </pc:sldChg>
-      <pc:sldChg chg="del">
-        <pc:chgData name="Meg Hemmerlein" userId="675d0259-84a2-4ee2-a6c1-034493f7a163" providerId="ADAL" clId="{012228E1-9350-51F7-B0E8-CFC048A68215}" dt="2026-07-27T22:10:27.795" v="29" actId="2696"/>
-        <pc:sldMkLst>
-          <pc:docMk/>
-          <pc:sldMk cId="0" sldId="292"/>
-        </pc:sldMkLst>
-      </pc:sldChg>
-      <pc:sldChg chg="del">
-        <pc:chgData name="Meg Hemmerlein" userId="675d0259-84a2-4ee2-a6c1-034493f7a163" providerId="ADAL" clId="{012228E1-9350-51F7-B0E8-CFC048A68215}" dt="2026-07-27T22:10:27.794" v="28" actId="2696"/>
-        <pc:sldMkLst>
-          <pc:docMk/>
-          <pc:sldMk cId="0" sldId="293"/>
-        </pc:sldMkLst>
-      </pc:sldChg>
-      <pc:sldChg chg="del">
-        <pc:chgData name="Meg Hemmerlein" userId="675d0259-84a2-4ee2-a6c1-034493f7a163" providerId="ADAL" clId="{012228E1-9350-51F7-B0E8-CFC048A68215}" dt="2026-07-27T22:10:27.805" v="37" actId="2696"/>
-        <pc:sldMkLst>
-          <pc:docMk/>
-          <pc:sldMk cId="0" sldId="294"/>
-        </pc:sldMkLst>
-      </pc:sldChg>
-      <pc:sldChg chg="del">
-        <pc:chgData name="Meg Hemmerlein" userId="675d0259-84a2-4ee2-a6c1-034493f7a163" providerId="ADAL" clId="{012228E1-9350-51F7-B0E8-CFC048A68215}" dt="2026-07-27T22:10:27.780" v="21" actId="2696"/>
-        <pc:sldMkLst>
-          <pc:docMk/>
-          <pc:sldMk cId="0" sldId="295"/>
-        </pc:sldMkLst>
-      </pc:sldChg>
-      <pc:sldChg chg="del">
-        <pc:chgData name="Meg Hemmerlein" userId="675d0259-84a2-4ee2-a6c1-034493f7a163" providerId="ADAL" clId="{012228E1-9350-51F7-B0E8-CFC048A68215}" dt="2026-07-27T22:10:27.797" v="31" actId="2696"/>
-        <pc:sldMkLst>
-          <pc:docMk/>
-          <pc:sldMk cId="0" sldId="296"/>
-        </pc:sldMkLst>
-      </pc:sldChg>
-      <pc:sldChg chg="del">
-        <pc:chgData name="Meg Hemmerlein" userId="675d0259-84a2-4ee2-a6c1-034493f7a163" providerId="ADAL" clId="{012228E1-9350-51F7-B0E8-CFC048A68215}" dt="2026-07-27T22:10:27.784" v="22" actId="2696"/>
-        <pc:sldMkLst>
-          <pc:docMk/>
-          <pc:sldMk cId="0" sldId="297"/>
-        </pc:sldMkLst>
-      </pc:sldChg>
-      <pc:sldChg chg="del">
-        <pc:chgData name="Meg Hemmerlein" userId="675d0259-84a2-4ee2-a6c1-034493f7a163" providerId="ADAL" clId="{012228E1-9350-51F7-B0E8-CFC048A68215}" dt="2026-07-27T22:10:27.796" v="30" actId="2696"/>
-        <pc:sldMkLst>
-          <pc:docMk/>
-          <pc:sldMk cId="0" sldId="298"/>
-        </pc:sldMkLst>
-      </pc:sldChg>
-      <pc:sldChg chg="del">
-        <pc:chgData name="Meg Hemmerlein" userId="675d0259-84a2-4ee2-a6c1-034493f7a163" providerId="ADAL" clId="{012228E1-9350-51F7-B0E8-CFC048A68215}" dt="2026-07-27T22:10:27.772" v="17" actId="2696"/>
-        <pc:sldMkLst>
-          <pc:docMk/>
-          <pc:sldMk cId="0" sldId="299"/>
-        </pc:sldMkLst>
       </pc:sldChg>
       <pc:sldChg chg="modSp add del mod">
         <pc:chgData name="Meg Hemmerlein" userId="675d0259-84a2-4ee2-a6c1-034493f7a163" providerId="ADAL" clId="{012228E1-9350-51F7-B0E8-CFC048A68215}" dt="2026-07-27T22:46:01.683" v="843" actId="14100"/>
@@ -1031,14 +530,6 @@
           <pc:docMk/>
           <pc:sldMasterMk cId="0" sldId="2147483659"/>
         </pc:sldMasterMkLst>
-        <pc:sldLayoutChg chg="del">
-          <pc:chgData name="Meg Hemmerlein" userId="675d0259-84a2-4ee2-a6c1-034493f7a163" providerId="ADAL" clId="{012228E1-9350-51F7-B0E8-CFC048A68215}" dt="2026-07-27T22:23:47.541" v="79" actId="2696"/>
-          <pc:sldLayoutMkLst>
-            <pc:docMk/>
-            <pc:sldMasterMk cId="0" sldId="2147483659"/>
-            <pc:sldLayoutMk cId="0" sldId="2147483650"/>
-          </pc:sldLayoutMkLst>
-        </pc:sldLayoutChg>
       </pc:sldMasterChg>
     </pc:docChg>
   </pc:docChgLst>
@@ -6650,7 +6141,22 @@
                   <a:schemeClr val="tx1"/>
                 </a:solidFill>
               </a:rPr>
-              <a:t>Column headers are values, not variable names.</a:t>
+              <a:t>Multiple variables are stored in one column</a:t>
+            </a:r>
+          </a:p>
+          <a:p>
+            <a:pPr marL="800100" lvl="1" indent="-342900">
+              <a:lnSpc>
+                <a:spcPct val="100000"/>
+              </a:lnSpc>
+            </a:pPr>
+            <a:r>
+              <a:rPr lang="en-US" sz="1800" dirty="0">
+                <a:solidFill>
+                  <a:schemeClr val="tx1"/>
+                </a:solidFill>
+              </a:rPr>
+              <a:t>27, Female</a:t>
             </a:r>
           </a:p>
           <a:p>
@@ -6658,9 +6164,19 @@
               <a:lnSpc>
                 <a:spcPct val="100000"/>
               </a:lnSpc>
-              <a:spcBef>
-                <a:spcPts val="1600"/>
-              </a:spcBef>
+              <a:buNone/>
+            </a:pPr>
+            <a:endParaRPr lang="en-US" sz="2000" dirty="0">
+              <a:solidFill>
+                <a:schemeClr val="tx1"/>
+              </a:solidFill>
+            </a:endParaRPr>
+          </a:p>
+          <a:p>
+            <a:pPr marL="0" indent="0">
+              <a:lnSpc>
+                <a:spcPct val="100000"/>
+              </a:lnSpc>
               <a:buNone/>
             </a:pPr>
             <a:r>
@@ -6669,67 +6185,110 @@
                   <a:schemeClr val="tx1"/>
                 </a:solidFill>
               </a:rPr>
-              <a:t>Multiple variables are stored in one column.</a:t>
+              <a:t>Naming variation</a:t>
             </a:r>
           </a:p>
           <a:p>
-            <a:pPr marL="0" indent="0">
+            <a:pPr marL="800100" lvl="1" indent="-342900">
               <a:lnSpc>
                 <a:spcPct val="100000"/>
               </a:lnSpc>
-              <a:spcBef>
-                <a:spcPts val="1600"/>
-              </a:spcBef>
-              <a:buNone/>
             </a:pPr>
             <a:r>
-              <a:rPr lang="en-US" sz="2000" dirty="0">
+              <a:rPr lang="en-US" sz="1800" dirty="0">
                 <a:solidFill>
                   <a:schemeClr val="tx1"/>
                 </a:solidFill>
               </a:rPr>
-              <a:t>Variables are stored in both rows and columns.</a:t>
+              <a:t>Status column</a:t>
             </a:r>
           </a:p>
           <a:p>
-            <a:pPr marL="0" indent="0">
+            <a:pPr marL="1257300" lvl="2" indent="-342900">
               <a:lnSpc>
                 <a:spcPct val="100000"/>
               </a:lnSpc>
-              <a:spcBef>
-                <a:spcPts val="1600"/>
-              </a:spcBef>
-              <a:buNone/>
             </a:pPr>
             <a:r>
-              <a:rPr lang="en-US" sz="2000" dirty="0">
+              <a:rPr lang="en-US" sz="1800" dirty="0">
                 <a:solidFill>
                   <a:schemeClr val="tx1"/>
                 </a:solidFill>
               </a:rPr>
-              <a:t>Multiple types of observational units are stored in the same table.</a:t>
+              <a:t>Preg</a:t>
             </a:r>
           </a:p>
           <a:p>
-            <a:pPr marL="0" indent="0">
+            <a:pPr marL="1257300" lvl="2" indent="-342900">
               <a:lnSpc>
                 <a:spcPct val="100000"/>
               </a:lnSpc>
-              <a:spcBef>
-                <a:spcPts val="1600"/>
-              </a:spcBef>
-              <a:spcAft>
-                <a:spcPts val="1600"/>
-              </a:spcAft>
-              <a:buNone/>
             </a:pPr>
             <a:r>
-              <a:rPr lang="en-US" sz="2000" dirty="0">
+              <a:rPr lang="en-US" sz="1800" dirty="0">
                 <a:solidFill>
                   <a:schemeClr val="tx1"/>
                 </a:solidFill>
               </a:rPr>
-              <a:t>A single observational unit is stored in multiple tables</a:t>
+              <a:t>pregnant</a:t>
+            </a:r>
+          </a:p>
+          <a:p>
+            <a:pPr marL="1257300" lvl="2" indent="-342900">
+              <a:lnSpc>
+                <a:spcPct val="100000"/>
+              </a:lnSpc>
+            </a:pPr>
+            <a:r>
+              <a:rPr lang="en-US" sz="1800" dirty="0">
+                <a:solidFill>
+                  <a:schemeClr val="tx1"/>
+                </a:solidFill>
+              </a:rPr>
+              <a:t>P</a:t>
+            </a:r>
+          </a:p>
+          <a:p>
+            <a:pPr marL="1257300" lvl="2" indent="-342900">
+              <a:lnSpc>
+                <a:spcPct val="100000"/>
+              </a:lnSpc>
+            </a:pPr>
+            <a:r>
+              <a:rPr lang="en-US" sz="1800" dirty="0">
+                <a:solidFill>
+                  <a:schemeClr val="tx1"/>
+                </a:solidFill>
+              </a:rPr>
+              <a:t>Not </a:t>
+            </a:r>
+            <a:r>
+              <a:rPr lang="en-US" sz="1800" dirty="0" err="1">
+                <a:solidFill>
+                  <a:schemeClr val="tx1"/>
+                </a:solidFill>
+              </a:rPr>
+              <a:t>preg</a:t>
+            </a:r>
+            <a:endParaRPr lang="en-US" sz="1800" dirty="0">
+              <a:solidFill>
+                <a:schemeClr val="tx1"/>
+              </a:solidFill>
+            </a:endParaRPr>
+          </a:p>
+          <a:p>
+            <a:pPr marL="1257300" lvl="2" indent="-342900">
+              <a:lnSpc>
+                <a:spcPct val="100000"/>
+              </a:lnSpc>
+            </a:pPr>
+            <a:r>
+              <a:rPr lang="en-US" sz="1800" dirty="0">
+                <a:solidFill>
+                  <a:schemeClr val="tx1"/>
+                </a:solidFill>
+              </a:rPr>
+              <a:t>NA</a:t>
             </a:r>
           </a:p>
         </p:txBody>
@@ -7379,6 +6938,32 @@
                 </a:solidFill>
               </a:rPr>
               <a:t>Record data</a:t>
+            </a:r>
+          </a:p>
+          <a:p>
+            <a:pPr marL="139700" indent="0">
+              <a:buNone/>
+            </a:pPr>
+            <a:r>
+              <a:rPr lang="en-US" sz="2000" dirty="0">
+                <a:solidFill>
+                  <a:schemeClr val="tx1"/>
+                </a:solidFill>
+              </a:rPr>
+              <a:t>	Make a google sheet</a:t>
+            </a:r>
+          </a:p>
+          <a:p>
+            <a:pPr marL="139700" indent="0">
+              <a:buNone/>
+            </a:pPr>
+            <a:r>
+              <a:rPr lang="en-US" sz="2000" dirty="0">
+                <a:solidFill>
+                  <a:schemeClr val="tx1"/>
+                </a:solidFill>
+              </a:rPr>
+              <a:t>	Why is our data tidy</a:t>
             </a:r>
           </a:p>
           <a:p>

--- a/Workshop-Sessions/Introduction-to-Coding/Data_Wrangling.pptx
+++ b/Workshop-Sessions/Introduction-to-Coding/Data_Wrangling.pptx
@@ -280,7 +280,7 @@
   <pc:docChgLst>
     <pc:chgData name="Meg Hemmerlein" userId="675d0259-84a2-4ee2-a6c1-034493f7a163" providerId="ADAL" clId="{012228E1-9350-51F7-B0E8-CFC048A68215}"/>
     <pc:docChg chg="undo custSel addSld delSld modSld">
-      <pc:chgData name="Meg Hemmerlein" userId="675d0259-84a2-4ee2-a6c1-034493f7a163" providerId="ADAL" clId="{012228E1-9350-51F7-B0E8-CFC048A68215}" dt="2026-08-03T20:38:54.626" v="1075" actId="20577"/>
+      <pc:chgData name="Meg Hemmerlein" userId="675d0259-84a2-4ee2-a6c1-034493f7a163" providerId="ADAL" clId="{012228E1-9350-51F7-B0E8-CFC048A68215}" dt="2026-08-06T20:37:06.544" v="1370" actId="20577"/>
       <pc:docMkLst>
         <pc:docMk/>
       </pc:docMkLst>
@@ -479,7 +479,7 @@
         </pc:picChg>
       </pc:sldChg>
       <pc:sldChg chg="addSp delSp modSp new mod">
-        <pc:chgData name="Meg Hemmerlein" userId="675d0259-84a2-4ee2-a6c1-034493f7a163" providerId="ADAL" clId="{012228E1-9350-51F7-B0E8-CFC048A68215}" dt="2026-07-28T16:19:00.525" v="888" actId="20577"/>
+        <pc:chgData name="Meg Hemmerlein" userId="675d0259-84a2-4ee2-a6c1-034493f7a163" providerId="ADAL" clId="{012228E1-9350-51F7-B0E8-CFC048A68215}" dt="2026-08-06T20:37:06.544" v="1370" actId="20577"/>
         <pc:sldMkLst>
           <pc:docMk/>
           <pc:sldMk cId="2082792097" sldId="280"/>
@@ -493,7 +493,7 @@
           </ac:spMkLst>
         </pc:spChg>
         <pc:spChg chg="mod">
-          <ac:chgData name="Meg Hemmerlein" userId="675d0259-84a2-4ee2-a6c1-034493f7a163" providerId="ADAL" clId="{012228E1-9350-51F7-B0E8-CFC048A68215}" dt="2026-07-28T16:19:00.525" v="888" actId="20577"/>
+          <ac:chgData name="Meg Hemmerlein" userId="675d0259-84a2-4ee2-a6c1-034493f7a163" providerId="ADAL" clId="{012228E1-9350-51F7-B0E8-CFC048A68215}" dt="2026-08-06T20:37:06.544" v="1370" actId="20577"/>
           <ac:spMkLst>
             <pc:docMk/>
             <pc:sldMk cId="2082792097" sldId="280"/>
@@ -523,6 +523,13 @@
             <ac:spMk id="392" creationId="{00000000-0000-0000-0000-000000000000}"/>
           </ac:spMkLst>
         </pc:spChg>
+      </pc:sldChg>
+      <pc:sldChg chg="new del">
+        <pc:chgData name="Meg Hemmerlein" userId="675d0259-84a2-4ee2-a6c1-034493f7a163" providerId="ADAL" clId="{012228E1-9350-51F7-B0E8-CFC048A68215}" dt="2026-08-06T20:35:07.897" v="1085" actId="2696"/>
+        <pc:sldMkLst>
+          <pc:docMk/>
+          <pc:sldMk cId="3345365667" sldId="301"/>
+        </pc:sldMkLst>
       </pc:sldChg>
       <pc:sldMasterChg chg="delSldLayout">
         <pc:chgData name="Meg Hemmerlein" userId="675d0259-84a2-4ee2-a6c1-034493f7a163" providerId="ADAL" clId="{012228E1-9350-51F7-B0E8-CFC048A68215}" dt="2026-07-27T22:23:47.541" v="79" actId="2696"/>
@@ -6908,89 +6915,108 @@
             <p:ph type="body" idx="1"/>
           </p:nvPr>
         </p:nvSpPr>
-        <p:spPr/>
+        <p:spPr>
+          <a:xfrm>
+            <a:off x="311699" y="1152475"/>
+            <a:ext cx="7898235" cy="3416400"/>
+          </a:xfrm>
+        </p:spPr>
         <p:txBody>
           <a:bodyPr>
             <a:normAutofit/>
           </a:bodyPr>
           <a:lstStyle/>
           <a:p>
-            <a:pPr marL="139700" indent="0">
-              <a:buNone/>
-            </a:pPr>
             <a:r>
               <a:rPr lang="en-US" sz="2000" dirty="0">
                 <a:solidFill>
                   <a:schemeClr val="tx1"/>
                 </a:solidFill>
               </a:rPr>
-              <a:t>Data collection</a:t>
+              <a:t>Review Google sheet with collected data</a:t>
             </a:r>
           </a:p>
           <a:p>
-            <a:pPr marL="139700" indent="0">
-              <a:buNone/>
-            </a:pPr>
+            <a:pPr lvl="1"/>
+            <a:r>
+              <a:rPr lang="en-US" sz="1800" dirty="0">
+                <a:solidFill>
+                  <a:schemeClr val="tx1"/>
+                </a:solidFill>
+              </a:rPr>
+              <a:t>Why did we use Google sheets?</a:t>
+            </a:r>
+          </a:p>
+          <a:p>
+            <a:pPr lvl="1"/>
+            <a:r>
+              <a:rPr lang="en-US" sz="1800" dirty="0">
+                <a:solidFill>
+                  <a:schemeClr val="tx1"/>
+                </a:solidFill>
+              </a:rPr>
+              <a:t>Is our data tidy?</a:t>
+            </a:r>
+          </a:p>
+          <a:p>
+            <a:endParaRPr lang="en-US" sz="2000" dirty="0">
+              <a:solidFill>
+                <a:schemeClr val="tx1"/>
+              </a:solidFill>
+            </a:endParaRPr>
+          </a:p>
+          <a:p>
             <a:r>
               <a:rPr lang="en-US" sz="2000" dirty="0">
                 <a:solidFill>
                   <a:schemeClr val="tx1"/>
                 </a:solidFill>
               </a:rPr>
-              <a:t>Record data</a:t>
+              <a:t>What are the questions we want to answer with our data?</a:t>
             </a:r>
           </a:p>
           <a:p>
-            <a:pPr marL="139700" indent="0">
-              <a:buNone/>
-            </a:pPr>
+            <a:pPr lvl="1"/>
+            <a:r>
+              <a:rPr lang="en-US" sz="1800" dirty="0">
+                <a:solidFill>
+                  <a:schemeClr val="tx1"/>
+                </a:solidFill>
+              </a:rPr>
+              <a:t>Did we make any previous predictions?</a:t>
+            </a:r>
+          </a:p>
+          <a:p>
+            <a:pPr lvl="1"/>
+            <a:endParaRPr lang="en-US" sz="1800" dirty="0">
+              <a:solidFill>
+                <a:schemeClr val="tx1"/>
+              </a:solidFill>
+            </a:endParaRPr>
+          </a:p>
+          <a:p>
             <a:r>
               <a:rPr lang="en-US" sz="2000" dirty="0">
                 <a:solidFill>
                   <a:schemeClr val="tx1"/>
                 </a:solidFill>
               </a:rPr>
-              <a:t>	Make a google sheet</a:t>
+              <a:t>Road map for plotting data</a:t>
             </a:r>
           </a:p>
           <a:p>
-            <a:pPr marL="139700" indent="0">
-              <a:buNone/>
-            </a:pPr>
-            <a:r>
-              <a:rPr lang="en-US" sz="2000" dirty="0">
-                <a:solidFill>
-                  <a:schemeClr val="tx1"/>
-                </a:solidFill>
-              </a:rPr>
-              <a:t>	Why is our data tidy</a:t>
-            </a:r>
-          </a:p>
-          <a:p>
-            <a:pPr marL="139700" indent="0">
-              <a:buNone/>
-            </a:pPr>
-            <a:r>
-              <a:rPr lang="en-US" sz="2000" dirty="0">
-                <a:solidFill>
-                  <a:schemeClr val="tx1"/>
-                </a:solidFill>
-              </a:rPr>
-              <a:t>Read into R</a:t>
-            </a:r>
-          </a:p>
-          <a:p>
-            <a:pPr marL="139700" indent="0">
-              <a:buNone/>
-            </a:pPr>
-            <a:r>
-              <a:rPr lang="en-US" sz="2000" dirty="0">
-                <a:solidFill>
-                  <a:schemeClr val="tx1"/>
-                </a:solidFill>
-              </a:rPr>
-              <a:t>Plot!</a:t>
-            </a:r>
+            <a:endParaRPr lang="en-US" sz="2000" dirty="0">
+              <a:solidFill>
+                <a:schemeClr val="tx1"/>
+              </a:solidFill>
+            </a:endParaRPr>
+          </a:p>
+          <a:p>
+            <a:endParaRPr lang="en-US" sz="2000" dirty="0">
+              <a:solidFill>
+                <a:schemeClr val="tx1"/>
+              </a:solidFill>
+            </a:endParaRPr>
           </a:p>
         </p:txBody>
       </p:sp>
